--- a/dist/초3/수학/분수와소수/초3_수학_분수와소수_03_소수의뜻_학생용.pptx
+++ b/dist/초3/수학/분수와소수/초3_수학_분수와소수_03_소수의뜻_학생용.pptx
@@ -120,13 +120,13 @@
   <p:extLst>
     <p:ext uri="{521415D9-36F7-43E2-AB2F-B90AF26B5E84}">
       <p14:sectionLst xmlns:p14="http://schemas.microsoft.com/office/powerpoint/2010/main">
-        <p14:section name="도입" id="{f8a0e9de-dc8e-fe3e-5e3b-437bc4764eca}">
+        <p14:section name="도입" id="{c3bd71fd-a77c-dbe4-1384-bc504dd7148e}">
           <p14:sldIdLst>
             <p14:sldId id="256"/>
             <p14:sldId id="257"/>
           </p14:sldIdLst>
         </p14:section>
-        <p14:section name="개념" id="{d557ee5d-80ce-df58-f48e-85b865e0cc44}">
+        <p14:section name="개념" id="{7d05c61d-7089-9bf7-f190-6eb47591fa95}">
           <p14:sldIdLst>
             <p14:sldId id="258"/>
             <p14:sldId id="259"/>
@@ -134,7 +134,7 @@
             <p14:sldId id="263"/>
           </p14:sldIdLst>
         </p14:section>
-        <p14:section name="연습" id="{eddcf2a4-0445-3dcd-a8d1-25de1fd8746c}">
+        <p14:section name="연습" id="{109e67ad-eb27-c9a8-0c93-d7d23100b7bd}">
           <p14:sldIdLst>
             <p14:sldId id="260"/>
             <p14:sldId id="262"/>
@@ -142,30 +142,30 @@
             <p14:sldId id="265"/>
           </p14:sldIdLst>
         </p14:section>
-        <p14:section name="개념" id="{dc990306-40a2-d557-810c-e54103b2d464}">
+        <p14:section name="개념" id="{84d0fce0-f847-5e3f-901a-99d6b956c3e7}">
           <p14:sldIdLst/>
         </p14:section>
-        <p14:section name="연습" id="{b618e277-4af5-d861-6f2c-0d2e3a4fe737}">
+        <p14:section name="연습" id="{9a9ee6e2-d567-12cc-1177-0da64e62487b}">
           <p14:sldIdLst/>
         </p14:section>
-        <p14:section name="개념" id="{99c8e4a3-f51a-6f2c-65cb-9a6db92a32ca}">
+        <p14:section name="개념" id="{d399d3b1-a9e8-0900-dd23-b0eb03a5e825}">
           <p14:sldIdLst/>
         </p14:section>
-        <p14:section name="연습" id="{c59895bd-2483-38d0-5bb2-5742117c22a0}">
+        <p14:section name="연습" id="{36c0807d-c775-8c2a-4454-a58573051893}">
           <p14:sldIdLst/>
         </p14:section>
-        <p14:section name="확인" id="{9560b743-a7cb-e39c-2b71-52a9daf7d443}">
+        <p14:section name="확인" id="{1f155c9b-3f6b-8e9c-75d9-b8b3144ea628}">
           <p14:sldIdLst>
             <p14:sldId id="266"/>
             <p14:sldId id="267"/>
           </p14:sldIdLst>
         </p14:section>
-        <p14:section name="정리" id="{9904a445-ceaf-6ce3-e7fc-a0b1cc8a3e5d}">
+        <p14:section name="정리" id="{124b65f6-1822-b696-0a93-c780b13a367f}">
           <p14:sldIdLst>
             <p14:sldId id="268"/>
           </p14:sldIdLst>
         </p14:section>
-        <p14:section name="보충" id="{258f8236-fdd4-c5d8-bb1b-883def0d4902}">
+        <p14:section name="보충" id="{dae14f11-0952-d703-ec64-a27e82ccb4bf}">
           <p14:sldIdLst>
             <p14:sldId id="269"/>
           </p14:sldIdLst>
@@ -12101,7 +12101,7 @@
               <a:buNone/>
             </a:pPr>
             <a:r>
-              <a:rPr lang="ko-KR" altLang="en-US" sz="3000" b="1" dirty="0">
+              <a:rPr lang="en-US" altLang="ko-KR" sz="3000" b="1" dirty="0">
                 <a:solidFill>
                   <a:srgbClr val="1F2937"/>
                 </a:solidFill>
